--- a/4_challenge/MLPC2025_team-observe_task-04-challenge_presentation.pptx
+++ b/4_challenge/MLPC2025_team-observe_task-04-challenge_presentation.pptx
@@ -643,7 +643,7 @@
           <a:p>
             <a:fld id="{5C731D18-B53C-4622-9947-A3FBDDB0C9B1}" type="slidenum">
               <a:rPr lang="de-AT" smtClean="0"/>
-              <a:t>‹#›</a:t>
+              <a:t>‹Nr.›</a:t>
             </a:fld>
             <a:endParaRPr lang="de-AT"/>
           </a:p>
@@ -901,7 +901,7 @@
           <a:p>
             <a:fld id="{BEF2A079-E7F8-4A78-8EEA-DD00A8D5DE37}" type="slidenum">
               <a:rPr lang="de-AT" smtClean="0"/>
-              <a:t>‹#›</a:t>
+              <a:t>‹Nr.›</a:t>
             </a:fld>
             <a:endParaRPr lang="de-AT"/>
           </a:p>
@@ -1386,7 +1386,7 @@
             <a:fld id="{68F3185B-C653-42AE-8B74-FF214C291574}" type="slidenum">
               <a:rPr lang="en-US" smtClean="0"/>
               <a:pPr/>
-              <a:t>‹#›</a:t>
+              <a:t>‹Nr.›</a:t>
             </a:fld>
             <a:endParaRPr lang="en-US" dirty="0"/>
           </a:p>
@@ -1651,7 +1651,7 @@
             <a:fld id="{68F3185B-C653-42AE-8B74-FF214C291574}" type="slidenum">
               <a:rPr lang="en-US" smtClean="0"/>
               <a:pPr/>
-              <a:t>‹#›</a:t>
+              <a:t>‹Nr.›</a:t>
             </a:fld>
             <a:endParaRPr lang="en-US" dirty="0"/>
           </a:p>
@@ -1905,7 +1905,7 @@
             <a:fld id="{68F3185B-C653-42AE-8B74-FF214C291574}" type="slidenum">
               <a:rPr lang="en-US" smtClean="0"/>
               <a:pPr/>
-              <a:t>‹#›</a:t>
+              <a:t>‹Nr.›</a:t>
             </a:fld>
             <a:endParaRPr lang="en-US" dirty="0"/>
           </a:p>
@@ -2206,7 +2206,7 @@
             <a:fld id="{68F3185B-C653-42AE-8B74-FF214C291574}" type="slidenum">
               <a:rPr lang="en-US" smtClean="0"/>
               <a:pPr/>
-              <a:t>‹#›</a:t>
+              <a:t>‹Nr.›</a:t>
             </a:fld>
             <a:endParaRPr lang="en-US" dirty="0"/>
           </a:p>
@@ -2447,7 +2447,7 @@
             <a:fld id="{68F3185B-C653-42AE-8B74-FF214C291574}" type="slidenum">
               <a:rPr lang="en-US" smtClean="0"/>
               <a:pPr/>
-              <a:t>‹#›</a:t>
+              <a:t>‹Nr.›</a:t>
             </a:fld>
             <a:endParaRPr lang="en-US" dirty="0"/>
           </a:p>
@@ -2683,7 +2683,7 @@
             <a:fld id="{68F3185B-C653-42AE-8B74-FF214C291574}" type="slidenum">
               <a:rPr lang="en-US" smtClean="0"/>
               <a:pPr/>
-              <a:t>‹#›</a:t>
+              <a:t>‹Nr.›</a:t>
             </a:fld>
             <a:endParaRPr lang="en-US" dirty="0"/>
           </a:p>
@@ -3029,7 +3029,7 @@
             <a:fld id="{68F3185B-C653-42AE-8B74-FF214C291574}" type="slidenum">
               <a:rPr lang="en-US" smtClean="0"/>
               <a:pPr/>
-              <a:t>‹#›</a:t>
+              <a:t>‹Nr.›</a:t>
             </a:fld>
             <a:endParaRPr lang="en-US" dirty="0"/>
           </a:p>
@@ -3259,7 +3259,7 @@
             <a:fld id="{68F3185B-C653-42AE-8B74-FF214C291574}" type="slidenum">
               <a:rPr lang="en-US" smtClean="0"/>
               <a:pPr/>
-              <a:t>‹#›</a:t>
+              <a:t>‹Nr.›</a:t>
             </a:fld>
             <a:endParaRPr lang="en-US" dirty="0"/>
           </a:p>
@@ -3393,7 +3393,7 @@
             <a:fld id="{68F3185B-C653-42AE-8B74-FF214C291574}" type="slidenum">
               <a:rPr lang="en-US" smtClean="0"/>
               <a:pPr/>
-              <a:t>‹#›</a:t>
+              <a:t>‹Nr.›</a:t>
             </a:fld>
             <a:endParaRPr lang="en-US" dirty="0"/>
           </a:p>
@@ -5238,7 +5238,7 @@
             <a:fld id="{68F3185B-C653-42AE-8B74-FF214C291574}" type="slidenum">
               <a:rPr lang="en-US" smtClean="0"/>
               <a:pPr/>
-              <a:t>‹#›</a:t>
+              <a:t>‹Nr.›</a:t>
             </a:fld>
             <a:endParaRPr lang="en-US" dirty="0"/>
           </a:p>
@@ -5550,7 +5550,7 @@
             <a:fld id="{68F3185B-C653-42AE-8B74-FF214C291574}" type="slidenum">
               <a:rPr lang="en-US" smtClean="0"/>
               <a:pPr/>
-              <a:t>‹#›</a:t>
+              <a:t>‹Nr.›</a:t>
             </a:fld>
             <a:endParaRPr lang="en-US" dirty="0"/>
           </a:p>
@@ -6178,7 +6178,7 @@
             <a:fld id="{68F3185B-C653-42AE-8B74-FF214C291574}" type="slidenum">
               <a:rPr lang="en-US" smtClean="0"/>
               <a:pPr/>
-              <a:t>‹#›</a:t>
+              <a:t>‹Nr.›</a:t>
             </a:fld>
             <a:endParaRPr lang="en-US" dirty="0"/>
           </a:p>
@@ -6452,7 +6452,7 @@
             <a:fld id="{68F3185B-C653-42AE-8B74-FF214C291574}" type="slidenum">
               <a:rPr lang="en-US" smtClean="0"/>
               <a:pPr/>
-              <a:t>‹#›</a:t>
+              <a:t>‹Nr.›</a:t>
             </a:fld>
             <a:endParaRPr lang="en-US" dirty="0"/>
           </a:p>
@@ -6622,7 +6622,7 @@
             <a:fld id="{68F3185B-C653-42AE-8B74-FF214C291574}" type="slidenum">
               <a:rPr lang="en-US" smtClean="0"/>
               <a:pPr/>
-              <a:t>‹#›</a:t>
+              <a:t>‹Nr.›</a:t>
             </a:fld>
             <a:endParaRPr lang="en-US" dirty="0"/>
           </a:p>
@@ -6811,7 +6811,7 @@
             <a:fld id="{68F3185B-C653-42AE-8B74-FF214C291574}" type="slidenum">
               <a:rPr lang="en-US" smtClean="0"/>
               <a:pPr/>
-              <a:t>‹#›</a:t>
+              <a:t>‹Nr.›</a:t>
             </a:fld>
             <a:endParaRPr lang="en-US" dirty="0"/>
           </a:p>
@@ -7426,6 +7426,13 @@
   <p:clrMapOvr>
     <a:masterClrMapping/>
   </p:clrMapOvr>
+  <p:timing>
+    <p:tnLst>
+      <p:par>
+        <p:cTn id="1" dur="indefinite" restart="never" nodeType="tmRoot"/>
+      </p:par>
+    </p:tnLst>
+  </p:timing>
 </p:sld>
 </file>
 
@@ -7469,7 +7476,11 @@
           <a:p>
             <a:r>
               <a:rPr lang="en-GB" dirty="0"/>
-              <a:t>Evaluation setup.</a:t>
+              <a:t>Evaluation </a:t>
+            </a:r>
+            <a:r>
+              <a:rPr lang="en-GB" dirty="0" smtClean="0"/>
+              <a:t>setup</a:t>
             </a:r>
             <a:endParaRPr lang="LID4096" dirty="0"/>
           </a:p>
@@ -7513,8 +7524,20 @@
             </a:r>
             <a:r>
               <a:rPr lang="en-GB" dirty="0"/>
-              <a:t>; 20% test</a:t>
-            </a:r>
+              <a:t>; 20% </a:t>
+            </a:r>
+            <a:r>
+              <a:rPr lang="en-GB" dirty="0" smtClean="0"/>
+              <a:t>test</a:t>
+            </a:r>
+            <a:br>
+              <a:rPr lang="en-GB" dirty="0" smtClean="0"/>
+            </a:br>
+            <a:r>
+              <a:rPr lang="en-GB" dirty="0" smtClean="0"/>
+              <a:t> </a:t>
+            </a:r>
+            <a:endParaRPr lang="en-GB" dirty="0"/>
           </a:p>
           <a:p>
             <a:r>
@@ -7526,8 +7549,20 @@
             <a:pPr lvl="1"/>
             <a:r>
               <a:rPr lang="en-GB" dirty="0"/>
-              <a:t>Average cost: 108.8553</a:t>
-            </a:r>
+              <a:t>Average cost: </a:t>
+            </a:r>
+            <a:r>
+              <a:rPr lang="en-GB" dirty="0" smtClean="0"/>
+              <a:t>108.8553</a:t>
+            </a:r>
+            <a:br>
+              <a:rPr lang="en-GB" dirty="0" smtClean="0"/>
+            </a:br>
+            <a:r>
+              <a:rPr lang="en-GB" dirty="0" smtClean="0"/>
+              <a:t> </a:t>
+            </a:r>
+            <a:endParaRPr lang="en-GB" dirty="0"/>
           </a:p>
         </p:txBody>
       </p:sp>
@@ -7566,6 +7601,13 @@
   <p:clrMapOvr>
     <a:masterClrMapping/>
   </p:clrMapOvr>
+  <p:timing>
+    <p:tnLst>
+      <p:par>
+        <p:cTn id="1" dur="indefinite" restart="never" nodeType="tmRoot"/>
+      </p:par>
+    </p:tnLst>
+  </p:timing>
 </p:sld>
 </file>
 
@@ -7746,6 +7788,13 @@
   <p:clrMapOvr>
     <a:masterClrMapping/>
   </p:clrMapOvr>
+  <p:timing>
+    <p:tnLst>
+      <p:par>
+        <p:cTn id="1" dur="indefinite" restart="never" nodeType="tmRoot"/>
+      </p:par>
+    </p:tnLst>
+  </p:timing>
 </p:sld>
 </file>
 
@@ -7836,12 +7885,12 @@
                   <a:t>Threshold </a:t>
                 </a:r>
                 <a:r>
-                  <a:rPr lang="en-GB" dirty="0" err="1"/>
-                  <a:t>searchspace</a:t>
+                  <a:rPr lang="en-GB" dirty="0" smtClean="0"/>
+                  <a:t>search space </a:t>
                 </a:r>
                 <a:r>
                   <a:rPr lang="en-GB" dirty="0"/>
-                  <a:t> consists of values from 0 to 1.</a:t>
+                  <a:t>consists of values from 0 to 1.</a:t>
                 </a:r>
               </a:p>
               <a:p>
@@ -7987,7 +8036,7 @@
               <a:lstStyle/>
               <a:p>
                 <a:r>
-                  <a:rPr lang="LID4096">
+                  <a:rPr lang="de-AT">
                     <a:noFill/>
                   </a:rPr>
                   <a:t> </a:t>
@@ -8062,6 +8111,13 @@
   <p:clrMapOvr>
     <a:masterClrMapping/>
   </p:clrMapOvr>
+  <p:timing>
+    <p:tnLst>
+      <p:par>
+        <p:cTn id="1" dur="indefinite" restart="never" nodeType="tmRoot"/>
+      </p:par>
+    </p:tnLst>
+  </p:timing>
 </p:sld>
 </file>
 
@@ -8148,8 +8204,13 @@
             <a:pPr lvl="1"/>
             <a:r>
               <a:rPr lang="en-GB" dirty="0"/>
-              <a:t>Amplified by weighted loss function: Model more pushed toward predicting positive</a:t>
-            </a:r>
+              <a:t>Amplified by weighted loss function: Model more pushed toward predicting </a:t>
+            </a:r>
+            <a:r>
+              <a:rPr lang="en-GB" dirty="0" smtClean="0"/>
+              <a:t>positive.</a:t>
+            </a:r>
+            <a:endParaRPr lang="en-GB" dirty="0"/>
           </a:p>
           <a:p>
             <a:r>
@@ -8238,6 +8299,13 @@
   <p:clrMapOvr>
     <a:masterClrMapping/>
   </p:clrMapOvr>
+  <p:timing>
+    <p:tnLst>
+      <p:par>
+        <p:cTn id="1" dur="indefinite" restart="never" nodeType="tmRoot"/>
+      </p:par>
+    </p:tnLst>
+  </p:timing>
 </p:sld>
 </file>
 
@@ -8427,6 +8495,13 @@
   <p:clrMapOvr>
     <a:masterClrMapping/>
   </p:clrMapOvr>
+  <p:timing>
+    <p:tnLst>
+      <p:par>
+        <p:cTn id="1" dur="indefinite" restart="never" nodeType="tmRoot"/>
+      </p:par>
+    </p:tnLst>
+  </p:timing>
 </p:sld>
 </file>
 
@@ -8583,6 +8658,13 @@
   <p:clrMapOvr>
     <a:masterClrMapping/>
   </p:clrMapOvr>
+  <p:timing>
+    <p:tnLst>
+      <p:par>
+        <p:cTn id="1" dur="indefinite" restart="never" nodeType="tmRoot"/>
+      </p:par>
+    </p:tnLst>
+  </p:timing>
 </p:sld>
 </file>
 
